--- a/docs/paper/diagram-sources-2026-09-16/figS7_evidence.pptx
+++ b/docs/paper/diagram-sources-2026-09-16/figS7_evidence.pptx
@@ -3625,7 +3625,7 @@
       </p:sp>
       <p:pic>
         <p:nvPicPr>
-          <p:cNvPr id="3" name="panel-a-image" descr="figS4_evidence.a.png"/>
+          <p:cNvPr id="3" name="panel-a-image" descr="figS7_evidence.a.png"/>
           <p:cNvPicPr>
             <a:picLocks noChangeAspect="1"/>
           </p:cNvPicPr>
@@ -3711,7 +3711,7 @@
       </p:sp>
       <p:pic>
         <p:nvPicPr>
-          <p:cNvPr id="3" name="panel-a-image" descr="figS4_evidence.a.ko.png"/>
+          <p:cNvPr id="3" name="panel-a-image" descr="figS7_evidence.a.ko.png"/>
           <p:cNvPicPr>
             <a:picLocks noChangeAspect="1"/>
           </p:cNvPicPr>
